--- a/EDI ENERGIE Soutenance.pptx
+++ b/EDI ENERGIE Soutenance.pptx
@@ -3911,7 +3911,7 @@
               <a:t>l'utilisateur, </a:t>
             </a:r>
             <a:r>
-              <a:rPr lang="en-US" sz="1150" dirty="0" err="1" smtClean="0">
+              <a:rPr lang="en-US" sz="1150" dirty="0" smtClean="0">
                 <a:solidFill>
                   <a:srgbClr val="1A1F2E"/>
                 </a:solidFill>
@@ -3919,7 +3919,7 @@
                 <a:ea typeface="Calibri" pitchFamily="34" charset="-122"/>
                 <a:cs typeface="Calibri" pitchFamily="34" charset="-120"/>
               </a:rPr>
-              <a:t>fonctionnalités,limites,règles</a:t>
+              <a:t>fonctionnalités, limites, règles </a:t>
             </a:r>
             <a:r>
               <a:rPr lang="en-US" sz="1150" dirty="0" smtClean="0">
@@ -3930,7 +3930,7 @@
                 <a:ea typeface="Calibri" pitchFamily="34" charset="-122"/>
                 <a:cs typeface="Calibri" pitchFamily="34" charset="-120"/>
               </a:rPr>
-              <a:t> métier</a:t>
+              <a:t>métier</a:t>
             </a:r>
             <a:endParaRPr lang="en-US" sz="1150" dirty="0"/>
           </a:p>
@@ -17527,20 +17527,10 @@
                 <a:ea typeface="Calibri" pitchFamily="34" charset="-122"/>
                 <a:cs typeface="Calibri" pitchFamily="34" charset="-120"/>
               </a:rPr>
-              <a:t>Id et classe Client</a:t>
-            </a:r>
-            <a:endParaRPr lang="en-US" sz="1150" dirty="0"/>
-          </a:p>
-          <a:p>
-            <a:pPr marL="342900" indent="-342900">
-              <a:spcAft>
-                <a:spcPts val="700"/>
-              </a:spcAft>
-              <a:buSzPct val="100000"/>
-              <a:buChar char="•"/>
-            </a:pPr>
-            <a:r>
-              <a:rPr lang="en-US" sz="1150" dirty="0">
+              <a:t>Id et classe </a:t>
+            </a:r>
+            <a:r>
+              <a:rPr lang="en-US" sz="1150" dirty="0" smtClean="0">
                 <a:solidFill>
                   <a:srgbClr val="1A1F2E"/>
                 </a:solidFill>
@@ -17548,19 +17538,16 @@
                 <a:ea typeface="Calibri" pitchFamily="34" charset="-122"/>
                 <a:cs typeface="Calibri" pitchFamily="34" charset="-120"/>
               </a:rPr>
-              <a:t>Classes Compteur / </a:t>
-            </a:r>
-            <a:r>
-              <a:rPr lang="en-US" sz="1150" dirty="0" smtClean="0">
-                <a:solidFill>
-                  <a:srgbClr val="1A1F2E"/>
-                </a:solidFill>
-                <a:latin typeface="Calibri" pitchFamily="34" charset="0"/>
-                <a:ea typeface="Calibri" pitchFamily="34" charset="-122"/>
-                <a:cs typeface="Calibri" pitchFamily="34" charset="-120"/>
-              </a:rPr>
-              <a:t>Facture</a:t>
-            </a:r>
+              <a:t>Client</a:t>
+            </a:r>
+            <a:endParaRPr lang="en-US" sz="1150" dirty="0" smtClean="0">
+              <a:solidFill>
+                <a:srgbClr val="1A1F2E"/>
+              </a:solidFill>
+              <a:latin typeface="Calibri" pitchFamily="34" charset="0"/>
+              <a:ea typeface="Calibri" pitchFamily="34" charset="-122"/>
+              <a:cs typeface="Calibri" pitchFamily="34" charset="-120"/>
+            </a:endParaRPr>
           </a:p>
           <a:p>
             <a:pPr marL="342900" indent="-342900">
@@ -17932,7 +17919,18 @@
                 <a:ea typeface="Calibri" pitchFamily="34" charset="-122"/>
                 <a:cs typeface="Calibri" pitchFamily="34" charset="-120"/>
               </a:rPr>
-              <a:t>ConnexionGU</a:t>
+              <a:t>Main</a:t>
+            </a:r>
+            <a:r>
+              <a:rPr lang="en-US" sz="1150" dirty="0" smtClean="0">
+                <a:solidFill>
+                  <a:srgbClr val="1A1F2E"/>
+                </a:solidFill>
+                <a:latin typeface="Calibri" pitchFamily="34" charset="0"/>
+                <a:ea typeface="Calibri" pitchFamily="34" charset="-122"/>
+                <a:cs typeface="Calibri" pitchFamily="34" charset="-120"/>
+              </a:rPr>
+              <a:t>GU</a:t>
             </a:r>
             <a:endParaRPr lang="en-US" sz="1150" dirty="0"/>
           </a:p>

--- a/EDI ENERGIE Soutenance.pptx
+++ b/EDI ENERGIE Soutenance.pptx
@@ -12645,14 +12645,954 @@
       </p:sp>
       <p:sp>
         <p:nvSpPr>
-          <p:cNvPr id="5" name="Shape 3"/>
+          <p:cNvPr id="6" name="Shape 4"/>
           <p:cNvSpPr/>
           <p:nvPr/>
         </p:nvSpPr>
         <p:spPr>
           <a:xfrm>
             <a:off x="548640" y="2011680"/>
-            <a:ext cx="5669280" cy="2331720"/>
+            <a:ext cx="73152" cy="2331720"/>
+          </a:xfrm>
+          <a:prstGeom prst="rect">
+            <a:avLst/>
+          </a:prstGeom>
+          <a:solidFill>
+            <a:srgbClr val="F39C12"/>
+          </a:solidFill>
+          <a:ln w="12700">
+            <a:solidFill>
+              <a:srgbClr val="F39C12"/>
+            </a:solidFill>
+            <a:prstDash val="solid"/>
+          </a:ln>
+        </p:spPr>
+      </p:sp>
+      <p:sp>
+        <p:nvSpPr>
+          <p:cNvPr id="7" name="Shape 5"/>
+          <p:cNvSpPr/>
+          <p:nvPr/>
+        </p:nvSpPr>
+        <p:spPr>
+          <a:xfrm>
+            <a:off x="777240" y="2148840"/>
+            <a:ext cx="118872" cy="118872"/>
+          </a:xfrm>
+          <a:prstGeom prst="ellipse">
+            <a:avLst/>
+          </a:prstGeom>
+          <a:solidFill>
+            <a:srgbClr val="FF5F56"/>
+          </a:solidFill>
+          <a:ln w="12700">
+            <a:solidFill>
+              <a:srgbClr val="FF5F56"/>
+            </a:solidFill>
+            <a:prstDash val="solid"/>
+          </a:ln>
+        </p:spPr>
+      </p:sp>
+      <p:sp>
+        <p:nvSpPr>
+          <p:cNvPr id="8" name="Shape 6"/>
+          <p:cNvSpPr/>
+          <p:nvPr/>
+        </p:nvSpPr>
+        <p:spPr>
+          <a:xfrm>
+            <a:off x="960120" y="2148840"/>
+            <a:ext cx="118872" cy="118872"/>
+          </a:xfrm>
+          <a:prstGeom prst="ellipse">
+            <a:avLst/>
+          </a:prstGeom>
+          <a:solidFill>
+            <a:srgbClr val="FFBD2E"/>
+          </a:solidFill>
+          <a:ln w="12700">
+            <a:solidFill>
+              <a:srgbClr val="FFBD2E"/>
+            </a:solidFill>
+            <a:prstDash val="solid"/>
+          </a:ln>
+        </p:spPr>
+      </p:sp>
+      <p:sp>
+        <p:nvSpPr>
+          <p:cNvPr id="9" name="Shape 7"/>
+          <p:cNvSpPr/>
+          <p:nvPr/>
+        </p:nvSpPr>
+        <p:spPr>
+          <a:xfrm>
+            <a:off x="1143000" y="2148840"/>
+            <a:ext cx="118872" cy="118872"/>
+          </a:xfrm>
+          <a:prstGeom prst="ellipse">
+            <a:avLst/>
+          </a:prstGeom>
+          <a:solidFill>
+            <a:srgbClr val="27C93F"/>
+          </a:solidFill>
+          <a:ln w="12700">
+            <a:solidFill>
+              <a:srgbClr val="27C93F"/>
+            </a:solidFill>
+            <a:prstDash val="solid"/>
+          </a:ln>
+        </p:spPr>
+      </p:sp>
+      <p:sp>
+        <p:nvSpPr>
+          <p:cNvPr id="10" name="Text 8"/>
+          <p:cNvSpPr/>
+          <p:nvPr/>
+        </p:nvSpPr>
+        <p:spPr>
+          <a:xfrm>
+            <a:off x="1417320" y="2084832"/>
+            <a:ext cx="4663440" cy="274320"/>
+          </a:xfrm>
+          <a:prstGeom prst="rect">
+            <a:avLst/>
+          </a:prstGeom>
+          <a:noFill/>
+          <a:ln/>
+        </p:spPr>
+        <p:txBody>
+          <a:bodyPr wrap="square" lIns="0" tIns="0" rIns="0" bIns="0" rtlCol="0" anchor="ctr"/>
+          <a:lstStyle/>
+          <a:p>
+            <a:pPr marL="0" indent="0">
+              <a:buNone/>
+            </a:pPr>
+            <a:r>
+              <a:rPr lang="en-US" sz="1000" i="1" dirty="0">
+                <a:solidFill>
+                  <a:srgbClr val="94A3B8"/>
+                </a:solidFill>
+                <a:latin typeface="Consolas" pitchFamily="34" charset="0"/>
+                <a:ea typeface="Consolas" pitchFamily="34" charset="-122"/>
+                <a:cs typeface="Consolas" pitchFamily="34" charset="-120"/>
+              </a:rPr>
+              <a:t>ConnexionDB.java</a:t>
+            </a:r>
+            <a:endParaRPr lang="en-US" sz="1000" dirty="0"/>
+          </a:p>
+        </p:txBody>
+      </p:sp>
+      <p:sp>
+        <p:nvSpPr>
+          <p:cNvPr id="11" name="Text 9"/>
+          <p:cNvSpPr/>
+          <p:nvPr/>
+        </p:nvSpPr>
+        <p:spPr>
+          <a:xfrm>
+            <a:off x="777240" y="2423160"/>
+            <a:ext cx="5303520" cy="1828800"/>
+          </a:xfrm>
+          <a:prstGeom prst="rect">
+            <a:avLst/>
+          </a:prstGeom>
+          <a:noFill/>
+          <a:ln/>
+        </p:spPr>
+        <p:txBody>
+          <a:bodyPr wrap="square" lIns="0" tIns="0" rIns="0" bIns="0" rtlCol="0" anchor="ctr"/>
+          <a:lstStyle/>
+          <a:p>
+            <a:pPr marL="0" indent="0">
+              <a:spcAft>
+                <a:spcPts val="200"/>
+              </a:spcAft>
+              <a:buNone/>
+            </a:pPr>
+            <a:r>
+              <a:rPr lang="en-US" sz="1050" dirty="0">
+                <a:solidFill>
+                  <a:srgbClr val="F39C12"/>
+                </a:solidFill>
+                <a:latin typeface="Consolas" pitchFamily="34" charset="0"/>
+                <a:ea typeface="Consolas" pitchFamily="34" charset="-122"/>
+                <a:cs typeface="Consolas" pitchFamily="34" charset="-120"/>
+              </a:rPr>
+              <a:t>public class ConnexionDB {</a:t>
+            </a:r>
+            <a:endParaRPr lang="en-US" sz="1050" dirty="0"/>
+          </a:p>
+          <a:p>
+            <a:pPr marL="0" indent="0">
+              <a:spcAft>
+                <a:spcPts val="200"/>
+              </a:spcAft>
+              <a:buNone/>
+            </a:pPr>
+            <a:r>
+              <a:rPr lang="en-US" sz="1050" dirty="0">
+                <a:solidFill>
+                  <a:srgbClr val="E6E9EF"/>
+                </a:solidFill>
+                <a:latin typeface="Consolas" pitchFamily="34" charset="0"/>
+                <a:ea typeface="Consolas" pitchFamily="34" charset="-122"/>
+                <a:cs typeface="Consolas" pitchFamily="34" charset="-120"/>
+              </a:rPr>
+              <a:t>  private static Connection conn;</a:t>
+            </a:r>
+            <a:endParaRPr lang="en-US" sz="1050" dirty="0"/>
+          </a:p>
+          <a:p>
+            <a:pPr marL="0" indent="0">
+              <a:spcAft>
+                <a:spcPts val="200"/>
+              </a:spcAft>
+              <a:buNone/>
+            </a:pPr>
+            <a:r>
+              <a:rPr lang="en-US" sz="1050" dirty="0">
+                <a:solidFill>
+                  <a:srgbClr val="16A085"/>
+                </a:solidFill>
+                <a:latin typeface="Consolas" pitchFamily="34" charset="0"/>
+                <a:ea typeface="Consolas" pitchFamily="34" charset="-122"/>
+                <a:cs typeface="Consolas" pitchFamily="34" charset="-120"/>
+              </a:rPr>
+              <a:t>  public static Connection getConnexion(){</a:t>
+            </a:r>
+            <a:endParaRPr lang="en-US" sz="1050" dirty="0"/>
+          </a:p>
+          <a:p>
+            <a:pPr marL="0" indent="0">
+              <a:spcAft>
+                <a:spcPts val="200"/>
+              </a:spcAft>
+              <a:buNone/>
+            </a:pPr>
+            <a:r>
+              <a:rPr lang="en-US" sz="1050" dirty="0">
+                <a:solidFill>
+                  <a:srgbClr val="E6E9EF"/>
+                </a:solidFill>
+                <a:latin typeface="Consolas" pitchFamily="34" charset="0"/>
+                <a:ea typeface="Consolas" pitchFamily="34" charset="-122"/>
+                <a:cs typeface="Consolas" pitchFamily="34" charset="-120"/>
+              </a:rPr>
+              <a:t>    if (conn == null)</a:t>
+            </a:r>
+            <a:endParaRPr lang="en-US" sz="1050" dirty="0"/>
+          </a:p>
+          <a:p>
+            <a:pPr marL="0" indent="0">
+              <a:spcAft>
+                <a:spcPts val="200"/>
+              </a:spcAft>
+              <a:buNone/>
+            </a:pPr>
+            <a:r>
+              <a:rPr lang="en-US" sz="1050" dirty="0">
+                <a:solidFill>
+                  <a:srgbClr val="E6E9EF"/>
+                </a:solidFill>
+                <a:latin typeface="Consolas" pitchFamily="34" charset="0"/>
+                <a:ea typeface="Consolas" pitchFamily="34" charset="-122"/>
+                <a:cs typeface="Consolas" pitchFamily="34" charset="-120"/>
+              </a:rPr>
+              <a:t>      conn = DriverManager.getConnection(</a:t>
+            </a:r>
+            <a:endParaRPr lang="en-US" sz="1050" dirty="0"/>
+          </a:p>
+          <a:p>
+            <a:pPr marL="0" indent="0">
+              <a:spcAft>
+                <a:spcPts val="200"/>
+              </a:spcAft>
+              <a:buNone/>
+            </a:pPr>
+            <a:r>
+              <a:rPr lang="en-US" sz="1050" dirty="0">
+                <a:solidFill>
+                  <a:srgbClr val="F39C12"/>
+                </a:solidFill>
+                <a:latin typeface="Consolas" pitchFamily="34" charset="0"/>
+                <a:ea typeface="Consolas" pitchFamily="34" charset="-122"/>
+                <a:cs typeface="Consolas" pitchFamily="34" charset="-120"/>
+              </a:rPr>
+              <a:t>        "jdbc:sqlite:projetjava.db");</a:t>
+            </a:r>
+            <a:endParaRPr lang="en-US" sz="1050" dirty="0"/>
+          </a:p>
+          <a:p>
+            <a:pPr marL="0" indent="0">
+              <a:spcAft>
+                <a:spcPts val="200"/>
+              </a:spcAft>
+              <a:buNone/>
+            </a:pPr>
+            <a:r>
+              <a:rPr lang="en-US" sz="1050" dirty="0">
+                <a:solidFill>
+                  <a:srgbClr val="E6E9EF"/>
+                </a:solidFill>
+                <a:latin typeface="Consolas" pitchFamily="34" charset="0"/>
+                <a:ea typeface="Consolas" pitchFamily="34" charset="-122"/>
+                <a:cs typeface="Consolas" pitchFamily="34" charset="-120"/>
+              </a:rPr>
+              <a:t>    return conn;</a:t>
+            </a:r>
+            <a:endParaRPr lang="en-US" sz="1050" dirty="0"/>
+          </a:p>
+          <a:p>
+            <a:pPr marL="0" indent="0">
+              <a:spcAft>
+                <a:spcPts val="200"/>
+              </a:spcAft>
+              <a:buNone/>
+            </a:pPr>
+            <a:r>
+              <a:rPr lang="en-US" sz="1050" dirty="0">
+                <a:solidFill>
+                  <a:srgbClr val="E6E9EF"/>
+                </a:solidFill>
+                <a:latin typeface="Consolas" pitchFamily="34" charset="0"/>
+                <a:ea typeface="Consolas" pitchFamily="34" charset="-122"/>
+                <a:cs typeface="Consolas" pitchFamily="34" charset="-120"/>
+              </a:rPr>
+              <a:t>  }</a:t>
+            </a:r>
+            <a:endParaRPr lang="en-US" sz="1050" dirty="0"/>
+          </a:p>
+          <a:p>
+            <a:pPr marL="0" indent="0">
+              <a:spcAft>
+                <a:spcPts val="200"/>
+              </a:spcAft>
+              <a:buNone/>
+            </a:pPr>
+            <a:r>
+              <a:rPr lang="en-US" sz="1050" dirty="0">
+                <a:solidFill>
+                  <a:srgbClr val="F39C12"/>
+                </a:solidFill>
+                <a:latin typeface="Consolas" pitchFamily="34" charset="0"/>
+                <a:ea typeface="Consolas" pitchFamily="34" charset="-122"/>
+                <a:cs typeface="Consolas" pitchFamily="34" charset="-120"/>
+              </a:rPr>
+              <a:t>}</a:t>
+            </a:r>
+            <a:endParaRPr lang="en-US" sz="1050" dirty="0"/>
+          </a:p>
+        </p:txBody>
+      </p:sp>
+      <p:sp>
+        <p:nvSpPr>
+          <p:cNvPr id="12" name="Text 10"/>
+          <p:cNvSpPr/>
+          <p:nvPr/>
+        </p:nvSpPr>
+        <p:spPr>
+          <a:xfrm>
+            <a:off x="548640" y="4434840"/>
+            <a:ext cx="5669280" cy="365760"/>
+          </a:xfrm>
+          <a:prstGeom prst="rect">
+            <a:avLst/>
+          </a:prstGeom>
+          <a:noFill/>
+          <a:ln/>
+        </p:spPr>
+        <p:txBody>
+          <a:bodyPr wrap="square" lIns="0" tIns="0" rIns="0" bIns="0" rtlCol="0" anchor="ctr"/>
+          <a:lstStyle/>
+          <a:p>
+            <a:pPr marL="0" indent="0">
+              <a:buNone/>
+            </a:pPr>
+            <a:r>
+              <a:rPr lang="en-US" sz="1100" i="1" dirty="0">
+                <a:solidFill>
+                  <a:srgbClr val="5C6878"/>
+                </a:solidFill>
+                <a:latin typeface="Calibri" pitchFamily="34" charset="0"/>
+                <a:ea typeface="Calibri" pitchFamily="34" charset="-122"/>
+                <a:cs typeface="Calibri" pitchFamily="34" charset="-120"/>
+              </a:rPr>
+              <a:t>Une seule connexion à la base, partagée par toutes les classes.</a:t>
+            </a:r>
+            <a:endParaRPr lang="en-US" sz="1100" dirty="0"/>
+          </a:p>
+        </p:txBody>
+      </p:sp>
+      <p:sp>
+        <p:nvSpPr>
+          <p:cNvPr id="13" name="Text 11"/>
+          <p:cNvSpPr/>
+          <p:nvPr/>
+        </p:nvSpPr>
+        <p:spPr>
+          <a:xfrm>
+            <a:off x="548640" y="4892040"/>
+            <a:ext cx="5669280" cy="320040"/>
+          </a:xfrm>
+          <a:prstGeom prst="rect">
+            <a:avLst/>
+          </a:prstGeom>
+          <a:noFill/>
+          <a:ln/>
+        </p:spPr>
+        <p:txBody>
+          <a:bodyPr wrap="square" lIns="0" tIns="0" rIns="0" bIns="0" rtlCol="0" anchor="ctr"/>
+          <a:lstStyle/>
+          <a:p>
+            <a:pPr marL="0" indent="0">
+              <a:buNone/>
+            </a:pPr>
+            <a:r>
+              <a:rPr lang="en-US" sz="1100" b="1" kern="0" spc="200" dirty="0">
+                <a:solidFill>
+                  <a:srgbClr val="16A085"/>
+                </a:solidFill>
+                <a:latin typeface="Consolas" pitchFamily="34" charset="0"/>
+                <a:ea typeface="Consolas" pitchFamily="34" charset="-122"/>
+                <a:cs typeface="Consolas" pitchFamily="34" charset="-120"/>
+              </a:rPr>
+              <a:t>IDENTIFIANT AUTO  ·  Id</a:t>
+            </a:r>
+            <a:endParaRPr lang="en-US" sz="1100" dirty="0"/>
+          </a:p>
+        </p:txBody>
+      </p:sp>
+      <p:sp>
+        <p:nvSpPr>
+          <p:cNvPr id="15" name="Shape 13"/>
+          <p:cNvSpPr/>
+          <p:nvPr/>
+        </p:nvSpPr>
+        <p:spPr>
+          <a:xfrm>
+            <a:off x="548640" y="5212080"/>
+            <a:ext cx="73152" cy="1051560"/>
+          </a:xfrm>
+          <a:prstGeom prst="rect">
+            <a:avLst/>
+          </a:prstGeom>
+          <a:solidFill>
+            <a:srgbClr val="F39C12"/>
+          </a:solidFill>
+          <a:ln w="12700">
+            <a:solidFill>
+              <a:srgbClr val="F39C12"/>
+            </a:solidFill>
+            <a:prstDash val="solid"/>
+          </a:ln>
+        </p:spPr>
+      </p:sp>
+      <p:sp>
+        <p:nvSpPr>
+          <p:cNvPr id="16" name="Shape 14"/>
+          <p:cNvSpPr/>
+          <p:nvPr/>
+        </p:nvSpPr>
+        <p:spPr>
+          <a:xfrm>
+            <a:off x="777240" y="5349240"/>
+            <a:ext cx="118872" cy="118872"/>
+          </a:xfrm>
+          <a:prstGeom prst="ellipse">
+            <a:avLst/>
+          </a:prstGeom>
+          <a:solidFill>
+            <a:srgbClr val="FF5F56"/>
+          </a:solidFill>
+          <a:ln w="12700">
+            <a:solidFill>
+              <a:srgbClr val="FF5F56"/>
+            </a:solidFill>
+            <a:prstDash val="solid"/>
+          </a:ln>
+        </p:spPr>
+      </p:sp>
+      <p:sp>
+        <p:nvSpPr>
+          <p:cNvPr id="17" name="Shape 15"/>
+          <p:cNvSpPr/>
+          <p:nvPr/>
+        </p:nvSpPr>
+        <p:spPr>
+          <a:xfrm>
+            <a:off x="960120" y="5349240"/>
+            <a:ext cx="118872" cy="118872"/>
+          </a:xfrm>
+          <a:prstGeom prst="ellipse">
+            <a:avLst/>
+          </a:prstGeom>
+          <a:solidFill>
+            <a:srgbClr val="FFBD2E"/>
+          </a:solidFill>
+          <a:ln w="12700">
+            <a:solidFill>
+              <a:srgbClr val="FFBD2E"/>
+            </a:solidFill>
+            <a:prstDash val="solid"/>
+          </a:ln>
+        </p:spPr>
+      </p:sp>
+      <p:sp>
+        <p:nvSpPr>
+          <p:cNvPr id="18" name="Shape 16"/>
+          <p:cNvSpPr/>
+          <p:nvPr/>
+        </p:nvSpPr>
+        <p:spPr>
+          <a:xfrm>
+            <a:off x="1143000" y="5349240"/>
+            <a:ext cx="118872" cy="118872"/>
+          </a:xfrm>
+          <a:prstGeom prst="ellipse">
+            <a:avLst/>
+          </a:prstGeom>
+          <a:solidFill>
+            <a:srgbClr val="27C93F"/>
+          </a:solidFill>
+          <a:ln w="12700">
+            <a:solidFill>
+              <a:srgbClr val="27C93F"/>
+            </a:solidFill>
+            <a:prstDash val="solid"/>
+          </a:ln>
+        </p:spPr>
+      </p:sp>
+      <p:sp>
+        <p:nvSpPr>
+          <p:cNvPr id="19" name="Text 17"/>
+          <p:cNvSpPr/>
+          <p:nvPr/>
+        </p:nvSpPr>
+        <p:spPr>
+          <a:xfrm>
+            <a:off x="777240" y="5623560"/>
+            <a:ext cx="5303520" cy="548640"/>
+          </a:xfrm>
+          <a:prstGeom prst="rect">
+            <a:avLst/>
+          </a:prstGeom>
+          <a:noFill/>
+          <a:ln/>
+        </p:spPr>
+        <p:txBody>
+          <a:bodyPr wrap="square" lIns="0" tIns="0" rIns="0" bIns="0" rtlCol="0" anchor="ctr"/>
+          <a:lstStyle/>
+          <a:p>
+            <a:pPr marL="0" indent="0">
+              <a:spcAft>
+                <a:spcPts val="200"/>
+              </a:spcAft>
+              <a:buNone/>
+            </a:pPr>
+            <a:r>
+              <a:rPr lang="en-US" sz="1050" dirty="0">
+                <a:solidFill>
+                  <a:srgbClr val="94A3B8"/>
+                </a:solidFill>
+                <a:latin typeface="Consolas" pitchFamily="34" charset="0"/>
+                <a:ea typeface="Consolas" pitchFamily="34" charset="-122"/>
+                <a:cs typeface="Consolas" pitchFamily="34" charset="-120"/>
+              </a:rPr>
+              <a:t>// 1er client = 1000, 2e = 1001 ...</a:t>
+            </a:r>
+            <a:endParaRPr lang="en-US" sz="1050" dirty="0"/>
+          </a:p>
+          <a:p>
+            <a:pPr marL="0" indent="0">
+              <a:spcAft>
+                <a:spcPts val="200"/>
+              </a:spcAft>
+              <a:buNone/>
+            </a:pPr>
+            <a:r>
+              <a:rPr lang="en-US" sz="1050" dirty="0">
+                <a:solidFill>
+                  <a:srgbClr val="E6E9EF"/>
+                </a:solidFill>
+                <a:latin typeface="Consolas" pitchFamily="34" charset="0"/>
+                <a:ea typeface="Consolas" pitchFamily="34" charset="-122"/>
+                <a:cs typeface="Consolas" pitchFamily="34" charset="-120"/>
+              </a:rPr>
+              <a:t>int id = compteur.getAndIncrement();</a:t>
+            </a:r>
+            <a:endParaRPr lang="en-US" sz="1050" dirty="0"/>
+          </a:p>
+        </p:txBody>
+      </p:sp>
+      <p:sp>
+        <p:nvSpPr>
+          <p:cNvPr id="20" name="Text 18"/>
+          <p:cNvSpPr/>
+          <p:nvPr/>
+        </p:nvSpPr>
+        <p:spPr>
+          <a:xfrm>
+            <a:off x="6400800" y="1645920"/>
+            <a:ext cx="5486400" cy="320040"/>
+          </a:xfrm>
+          <a:prstGeom prst="rect">
+            <a:avLst/>
+          </a:prstGeom>
+          <a:noFill/>
+          <a:ln/>
+        </p:spPr>
+        <p:txBody>
+          <a:bodyPr wrap="square" lIns="0" tIns="0" rIns="0" bIns="0" rtlCol="0" anchor="ctr"/>
+          <a:lstStyle/>
+          <a:p>
+            <a:pPr marL="0" indent="0">
+              <a:buNone/>
+            </a:pPr>
+            <a:r>
+              <a:rPr lang="en-US" sz="1100" b="1" kern="0" spc="200" dirty="0">
+                <a:solidFill>
+                  <a:srgbClr val="F39C12"/>
+                </a:solidFill>
+                <a:latin typeface="Consolas" pitchFamily="34" charset="0"/>
+                <a:ea typeface="Consolas" pitchFamily="34" charset="-122"/>
+                <a:cs typeface="Consolas" pitchFamily="34" charset="-120"/>
+              </a:rPr>
+              <a:t>VALIDATION  ·  Compteur (n° à 14 chiffres)</a:t>
+            </a:r>
+            <a:endParaRPr lang="en-US" sz="1100" dirty="0"/>
+          </a:p>
+        </p:txBody>
+      </p:sp>
+      <p:sp>
+        <p:nvSpPr>
+          <p:cNvPr id="22" name="Shape 20"/>
+          <p:cNvSpPr/>
+          <p:nvPr/>
+        </p:nvSpPr>
+        <p:spPr>
+          <a:xfrm>
+            <a:off x="6400800" y="2011680"/>
+            <a:ext cx="73152" cy="2103120"/>
+          </a:xfrm>
+          <a:prstGeom prst="rect">
+            <a:avLst/>
+          </a:prstGeom>
+          <a:solidFill>
+            <a:srgbClr val="F39C12"/>
+          </a:solidFill>
+          <a:ln w="12700">
+            <a:solidFill>
+              <a:srgbClr val="F39C12"/>
+            </a:solidFill>
+            <a:prstDash val="solid"/>
+          </a:ln>
+        </p:spPr>
+      </p:sp>
+      <p:sp>
+        <p:nvSpPr>
+          <p:cNvPr id="23" name="Shape 21"/>
+          <p:cNvSpPr/>
+          <p:nvPr/>
+        </p:nvSpPr>
+        <p:spPr>
+          <a:xfrm>
+            <a:off x="6629400" y="2148840"/>
+            <a:ext cx="118872" cy="118872"/>
+          </a:xfrm>
+          <a:prstGeom prst="ellipse">
+            <a:avLst/>
+          </a:prstGeom>
+          <a:solidFill>
+            <a:srgbClr val="FF5F56"/>
+          </a:solidFill>
+          <a:ln w="12700">
+            <a:solidFill>
+              <a:srgbClr val="FF5F56"/>
+            </a:solidFill>
+            <a:prstDash val="solid"/>
+          </a:ln>
+        </p:spPr>
+      </p:sp>
+      <p:sp>
+        <p:nvSpPr>
+          <p:cNvPr id="24" name="Shape 22"/>
+          <p:cNvSpPr/>
+          <p:nvPr/>
+        </p:nvSpPr>
+        <p:spPr>
+          <a:xfrm>
+            <a:off x="6812280" y="2148840"/>
+            <a:ext cx="118872" cy="118872"/>
+          </a:xfrm>
+          <a:prstGeom prst="ellipse">
+            <a:avLst/>
+          </a:prstGeom>
+          <a:solidFill>
+            <a:srgbClr val="FFBD2E"/>
+          </a:solidFill>
+          <a:ln w="12700">
+            <a:solidFill>
+              <a:srgbClr val="FFBD2E"/>
+            </a:solidFill>
+            <a:prstDash val="solid"/>
+          </a:ln>
+        </p:spPr>
+      </p:sp>
+      <p:sp>
+        <p:nvSpPr>
+          <p:cNvPr id="25" name="Shape 23"/>
+          <p:cNvSpPr/>
+          <p:nvPr/>
+        </p:nvSpPr>
+        <p:spPr>
+          <a:xfrm>
+            <a:off x="6995160" y="2148840"/>
+            <a:ext cx="118872" cy="118872"/>
+          </a:xfrm>
+          <a:prstGeom prst="ellipse">
+            <a:avLst/>
+          </a:prstGeom>
+          <a:solidFill>
+            <a:srgbClr val="27C93F"/>
+          </a:solidFill>
+          <a:ln w="12700">
+            <a:solidFill>
+              <a:srgbClr val="27C93F"/>
+            </a:solidFill>
+            <a:prstDash val="solid"/>
+          </a:ln>
+        </p:spPr>
+      </p:sp>
+      <p:sp>
+        <p:nvSpPr>
+          <p:cNvPr id="26" name="Text 24"/>
+          <p:cNvSpPr/>
+          <p:nvPr/>
+        </p:nvSpPr>
+        <p:spPr>
+          <a:xfrm>
+            <a:off x="7269480" y="2084832"/>
+            <a:ext cx="4297680" cy="274320"/>
+          </a:xfrm>
+          <a:prstGeom prst="rect">
+            <a:avLst/>
+          </a:prstGeom>
+          <a:noFill/>
+          <a:ln/>
+        </p:spPr>
+        <p:txBody>
+          <a:bodyPr wrap="square" lIns="0" tIns="0" rIns="0" bIns="0" rtlCol="0" anchor="ctr"/>
+          <a:lstStyle/>
+          <a:p>
+            <a:pPr marL="0" indent="0">
+              <a:buNone/>
+            </a:pPr>
+            <a:r>
+              <a:rPr lang="en-US" sz="1000" i="1" dirty="0">
+                <a:solidFill>
+                  <a:srgbClr val="94A3B8"/>
+                </a:solidFill>
+                <a:latin typeface="Consolas" pitchFamily="34" charset="0"/>
+                <a:ea typeface="Consolas" pitchFamily="34" charset="-122"/>
+                <a:cs typeface="Consolas" pitchFamily="34" charset="-120"/>
+              </a:rPr>
+              <a:t>Compteur.java</a:t>
+            </a:r>
+            <a:endParaRPr lang="en-US" sz="1000" dirty="0"/>
+          </a:p>
+        </p:txBody>
+      </p:sp>
+      <p:sp>
+        <p:nvSpPr>
+          <p:cNvPr id="27" name="Text 25"/>
+          <p:cNvSpPr/>
+          <p:nvPr/>
+        </p:nvSpPr>
+        <p:spPr>
+          <a:xfrm>
+            <a:off x="6629400" y="2423160"/>
+            <a:ext cx="4937760" cy="1600200"/>
+          </a:xfrm>
+          <a:prstGeom prst="rect">
+            <a:avLst/>
+          </a:prstGeom>
+          <a:noFill/>
+          <a:ln/>
+        </p:spPr>
+        <p:txBody>
+          <a:bodyPr wrap="square" lIns="0" tIns="0" rIns="0" bIns="0" rtlCol="0" anchor="ctr"/>
+          <a:lstStyle/>
+          <a:p>
+            <a:pPr marL="0" indent="0">
+              <a:spcAft>
+                <a:spcPts val="200"/>
+              </a:spcAft>
+              <a:buNone/>
+            </a:pPr>
+            <a:r>
+              <a:rPr lang="en-US" sz="1050" dirty="0">
+                <a:solidFill>
+                  <a:srgbClr val="16A085"/>
+                </a:solidFill>
+                <a:latin typeface="Consolas" pitchFamily="34" charset="0"/>
+                <a:ea typeface="Consolas" pitchFamily="34" charset="-122"/>
+                <a:cs typeface="Consolas" pitchFamily="34" charset="-120"/>
+              </a:rPr>
+              <a:t>public void setNumero(String numero) {</a:t>
+            </a:r>
+            <a:endParaRPr lang="en-US" sz="1050" dirty="0"/>
+          </a:p>
+          <a:p>
+            <a:pPr marL="0" indent="0">
+              <a:spcAft>
+                <a:spcPts val="200"/>
+              </a:spcAft>
+              <a:buNone/>
+            </a:pPr>
+            <a:r>
+              <a:rPr lang="en-US" sz="1050" dirty="0">
+                <a:solidFill>
+                  <a:srgbClr val="E6E9EF"/>
+                </a:solidFill>
+                <a:latin typeface="Consolas" pitchFamily="34" charset="0"/>
+                <a:ea typeface="Consolas" pitchFamily="34" charset="-122"/>
+                <a:cs typeface="Consolas" pitchFamily="34" charset="-120"/>
+              </a:rPr>
+              <a:t>  if (numero.length() != 14)</a:t>
+            </a:r>
+            <a:endParaRPr lang="en-US" sz="1050" dirty="0"/>
+          </a:p>
+          <a:p>
+            <a:pPr marL="0" indent="0">
+              <a:spcAft>
+                <a:spcPts val="200"/>
+              </a:spcAft>
+              <a:buNone/>
+            </a:pPr>
+            <a:r>
+              <a:rPr lang="en-US" sz="1050" dirty="0">
+                <a:solidFill>
+                  <a:srgbClr val="E74C3C"/>
+                </a:solidFill>
+                <a:latin typeface="Consolas" pitchFamily="34" charset="0"/>
+                <a:ea typeface="Consolas" pitchFamily="34" charset="-122"/>
+                <a:cs typeface="Consolas" pitchFamily="34" charset="-120"/>
+              </a:rPr>
+              <a:t>    throw new IllegalArgumentException(</a:t>
+            </a:r>
+            <a:endParaRPr lang="en-US" sz="1050" dirty="0"/>
+          </a:p>
+          <a:p>
+            <a:pPr marL="0" indent="0">
+              <a:spcAft>
+                <a:spcPts val="200"/>
+              </a:spcAft>
+              <a:buNone/>
+            </a:pPr>
+            <a:r>
+              <a:rPr lang="en-US" sz="1050" dirty="0">
+                <a:solidFill>
+                  <a:srgbClr val="F39C12"/>
+                </a:solidFill>
+                <a:latin typeface="Consolas" pitchFamily="34" charset="0"/>
+                <a:ea typeface="Consolas" pitchFamily="34" charset="-122"/>
+                <a:cs typeface="Consolas" pitchFamily="34" charset="-120"/>
+              </a:rPr>
+              <a:t>      "Le numéro doit faire 14 chiffres");</a:t>
+            </a:r>
+            <a:endParaRPr lang="en-US" sz="1050" dirty="0"/>
+          </a:p>
+          <a:p>
+            <a:pPr marL="0" indent="0">
+              <a:spcAft>
+                <a:spcPts val="200"/>
+              </a:spcAft>
+              <a:buNone/>
+            </a:pPr>
+            <a:r>
+              <a:rPr lang="en-US" sz="1050" dirty="0">
+                <a:solidFill>
+                  <a:srgbClr val="E6E9EF"/>
+                </a:solidFill>
+                <a:latin typeface="Consolas" pitchFamily="34" charset="0"/>
+                <a:ea typeface="Consolas" pitchFamily="34" charset="-122"/>
+                <a:cs typeface="Consolas" pitchFamily="34" charset="-120"/>
+              </a:rPr>
+              <a:t>  this.numero = numero;</a:t>
+            </a:r>
+            <a:endParaRPr lang="en-US" sz="1050" dirty="0"/>
+          </a:p>
+          <a:p>
+            <a:pPr marL="0" indent="0">
+              <a:spcAft>
+                <a:spcPts val="200"/>
+              </a:spcAft>
+              <a:buNone/>
+            </a:pPr>
+            <a:r>
+              <a:rPr lang="en-US" sz="1050" dirty="0">
+                <a:solidFill>
+                  <a:srgbClr val="16A085"/>
+                </a:solidFill>
+                <a:latin typeface="Consolas" pitchFamily="34" charset="0"/>
+                <a:ea typeface="Consolas" pitchFamily="34" charset="-122"/>
+                <a:cs typeface="Consolas" pitchFamily="34" charset="-120"/>
+              </a:rPr>
+              <a:t>}</a:t>
+            </a:r>
+            <a:endParaRPr lang="en-US" sz="1050" dirty="0"/>
+          </a:p>
+        </p:txBody>
+      </p:sp>
+      <p:sp>
+        <p:nvSpPr>
+          <p:cNvPr id="28" name="Text 26"/>
+          <p:cNvSpPr/>
+          <p:nvPr/>
+        </p:nvSpPr>
+        <p:spPr>
+          <a:xfrm>
+            <a:off x="6400800" y="4251960"/>
+            <a:ext cx="5486400" cy="320040"/>
+          </a:xfrm>
+          <a:prstGeom prst="rect">
+            <a:avLst/>
+          </a:prstGeom>
+          <a:noFill/>
+          <a:ln/>
+        </p:spPr>
+        <p:txBody>
+          <a:bodyPr wrap="square" lIns="0" tIns="0" rIns="0" bIns="0" rtlCol="0" anchor="ctr"/>
+          <a:lstStyle/>
+          <a:p>
+            <a:pPr marL="0" indent="0">
+              <a:buNone/>
+            </a:pPr>
+            <a:r>
+              <a:rPr lang="en-US" sz="1100" b="1" kern="0" spc="200" dirty="0">
+                <a:solidFill>
+                  <a:srgbClr val="9B2C8E"/>
+                </a:solidFill>
+                <a:latin typeface="Consolas" pitchFamily="34" charset="0"/>
+                <a:ea typeface="Consolas" pitchFamily="34" charset="-122"/>
+                <a:cs typeface="Consolas" pitchFamily="34" charset="-120"/>
+              </a:rPr>
+              <a:t>CALCUL DU MONTANT  ·  Facture (0,15 €/kWh)</a:t>
+            </a:r>
+            <a:endParaRPr lang="en-US" sz="1100" dirty="0"/>
+          </a:p>
+        </p:txBody>
+      </p:sp>
+      <p:sp>
+        <p:nvSpPr>
+          <p:cNvPr id="29" name="Shape 27"/>
+          <p:cNvSpPr/>
+          <p:nvPr/>
+        </p:nvSpPr>
+        <p:spPr>
+          <a:xfrm>
+            <a:off x="6400800" y="4572000"/>
+            <a:ext cx="5303520" cy="1691640"/>
           </a:xfrm>
           <a:prstGeom prst="rect">
             <a:avLst/>
@@ -12670,14 +13610,14 @@
       </p:sp>
       <p:sp>
         <p:nvSpPr>
-          <p:cNvPr id="6" name="Shape 4"/>
-          <p:cNvSpPr/>
-          <p:nvPr/>
-        </p:nvSpPr>
-        <p:spPr>
-          <a:xfrm>
-            <a:off x="548640" y="2011680"/>
-            <a:ext cx="73152" cy="2331720"/>
+          <p:cNvPr id="30" name="Shape 28"/>
+          <p:cNvSpPr/>
+          <p:nvPr/>
+        </p:nvSpPr>
+        <p:spPr>
+          <a:xfrm>
+            <a:off x="6400800" y="4572000"/>
+            <a:ext cx="73152" cy="1691640"/>
           </a:xfrm>
           <a:prstGeom prst="rect">
             <a:avLst/>
@@ -12695,13 +13635,13 @@
       </p:sp>
       <p:sp>
         <p:nvSpPr>
-          <p:cNvPr id="7" name="Shape 5"/>
-          <p:cNvSpPr/>
-          <p:nvPr/>
-        </p:nvSpPr>
-        <p:spPr>
-          <a:xfrm>
-            <a:off x="777240" y="2148840"/>
+          <p:cNvPr id="31" name="Shape 29"/>
+          <p:cNvSpPr/>
+          <p:nvPr/>
+        </p:nvSpPr>
+        <p:spPr>
+          <a:xfrm>
+            <a:off x="6629400" y="4709160"/>
             <a:ext cx="118872" cy="118872"/>
           </a:xfrm>
           <a:prstGeom prst="ellipse">
@@ -12720,13 +13660,13 @@
       </p:sp>
       <p:sp>
         <p:nvSpPr>
-          <p:cNvPr id="8" name="Shape 6"/>
-          <p:cNvSpPr/>
-          <p:nvPr/>
-        </p:nvSpPr>
-        <p:spPr>
-          <a:xfrm>
-            <a:off x="960120" y="2148840"/>
+          <p:cNvPr id="32" name="Shape 30"/>
+          <p:cNvSpPr/>
+          <p:nvPr/>
+        </p:nvSpPr>
+        <p:spPr>
+          <a:xfrm>
+            <a:off x="6812280" y="4709160"/>
             <a:ext cx="118872" cy="118872"/>
           </a:xfrm>
           <a:prstGeom prst="ellipse">
@@ -12745,13 +13685,13 @@
       </p:sp>
       <p:sp>
         <p:nvSpPr>
-          <p:cNvPr id="9" name="Shape 7"/>
-          <p:cNvSpPr/>
-          <p:nvPr/>
-        </p:nvSpPr>
-        <p:spPr>
-          <a:xfrm>
-            <a:off x="1143000" y="2148840"/>
+          <p:cNvPr id="33" name="Shape 31"/>
+          <p:cNvSpPr/>
+          <p:nvPr/>
+        </p:nvSpPr>
+        <p:spPr>
+          <a:xfrm>
+            <a:off x="6995160" y="4709160"/>
             <a:ext cx="118872" cy="118872"/>
           </a:xfrm>
           <a:prstGeom prst="ellipse">
@@ -12770,14 +13710,14 @@
       </p:sp>
       <p:sp>
         <p:nvSpPr>
-          <p:cNvPr id="10" name="Text 8"/>
-          <p:cNvSpPr/>
-          <p:nvPr/>
-        </p:nvSpPr>
-        <p:spPr>
-          <a:xfrm>
-            <a:off x="1417320" y="2084832"/>
-            <a:ext cx="4663440" cy="274320"/>
+          <p:cNvPr id="34" name="Text 32"/>
+          <p:cNvSpPr/>
+          <p:nvPr/>
+        </p:nvSpPr>
+        <p:spPr>
+          <a:xfrm>
+            <a:off x="7269480" y="4645152"/>
+            <a:ext cx="4297680" cy="274320"/>
           </a:xfrm>
           <a:prstGeom prst="rect">
             <a:avLst/>
@@ -12801,7 +13741,7 @@
                 <a:ea typeface="Consolas" pitchFamily="34" charset="-122"/>
                 <a:cs typeface="Consolas" pitchFamily="34" charset="-120"/>
               </a:rPr>
-              <a:t>ConnexionDB.java</a:t>
+              <a:t>Facture.java</a:t>
             </a:r>
             <a:endParaRPr lang="en-US" sz="1000" dirty="0"/>
           </a:p>
@@ -12809,14 +13749,14 @@
       </p:sp>
       <p:sp>
         <p:nvSpPr>
-          <p:cNvPr id="11" name="Text 9"/>
-          <p:cNvSpPr/>
-          <p:nvPr/>
-        </p:nvSpPr>
-        <p:spPr>
-          <a:xfrm>
-            <a:off x="777240" y="2423160"/>
-            <a:ext cx="5303520" cy="1828800"/>
+          <p:cNvPr id="35" name="Text 33"/>
+          <p:cNvSpPr/>
+          <p:nvPr/>
+        </p:nvSpPr>
+        <p:spPr>
+          <a:xfrm>
+            <a:off x="6629400" y="4983480"/>
+            <a:ext cx="4937760" cy="1188720"/>
           </a:xfrm>
           <a:prstGeom prst="rect">
             <a:avLst/>
@@ -12837,13 +13777,13 @@
             <a:r>
               <a:rPr lang="en-US" sz="1050" dirty="0">
                 <a:solidFill>
-                  <a:srgbClr val="F39C12"/>
+                  <a:srgbClr val="16A085"/>
                 </a:solidFill>
                 <a:latin typeface="Consolas" pitchFamily="34" charset="0"/>
                 <a:ea typeface="Consolas" pitchFamily="34" charset="-122"/>
                 <a:cs typeface="Consolas" pitchFamily="34" charset="-120"/>
               </a:rPr>
-              <a:t>public class ConnexionDB {</a:t>
+              <a:t>public double calculerMontant() {</a:t>
             </a:r>
             <a:endParaRPr lang="en-US" sz="1050" dirty="0"/>
           </a:p>
@@ -12857,13 +13797,13 @@
             <a:r>
               <a:rPr lang="en-US" sz="1050" dirty="0">
                 <a:solidFill>
-                  <a:srgbClr val="E6E9EF"/>
+                  <a:srgbClr val="94A3B8"/>
                 </a:solidFill>
                 <a:latin typeface="Consolas" pitchFamily="34" charset="0"/>
                 <a:ea typeface="Consolas" pitchFamily="34" charset="-122"/>
                 <a:cs typeface="Consolas" pitchFamily="34" charset="-120"/>
               </a:rPr>
-              <a:t>  private static Connection conn;</a:t>
+              <a:t>  double TARIF = 0.15;  // € par kWh</a:t>
             </a:r>
             <a:endParaRPr lang="en-US" sz="1050" dirty="0"/>
           </a:p>
@@ -12877,13 +13817,13 @@
             <a:r>
               <a:rPr lang="en-US" sz="1050" dirty="0">
                 <a:solidFill>
-                  <a:srgbClr val="16A085"/>
+                  <a:srgbClr val="E6E9EF"/>
                 </a:solidFill>
                 <a:latin typeface="Consolas" pitchFamily="34" charset="0"/>
                 <a:ea typeface="Consolas" pitchFamily="34" charset="-122"/>
                 <a:cs typeface="Consolas" pitchFamily="34" charset="-120"/>
               </a:rPr>
-              <a:t>  public static Connection getConnexion(){</a:t>
+              <a:t>  return consommation * TARIF;</a:t>
             </a:r>
             <a:endParaRPr lang="en-US" sz="1050" dirty="0"/>
           </a:p>
@@ -12897,1027 +13837,12 @@
             <a:r>
               <a:rPr lang="en-US" sz="1050" dirty="0">
                 <a:solidFill>
-                  <a:srgbClr val="E6E9EF"/>
+                  <a:srgbClr val="16A085"/>
                 </a:solidFill>
                 <a:latin typeface="Consolas" pitchFamily="34" charset="0"/>
                 <a:ea typeface="Consolas" pitchFamily="34" charset="-122"/>
                 <a:cs typeface="Consolas" pitchFamily="34" charset="-120"/>
               </a:rPr>
-              <a:t>    if (conn == null)</a:t>
-            </a:r>
-            <a:endParaRPr lang="en-US" sz="1050" dirty="0"/>
-          </a:p>
-          <a:p>
-            <a:pPr marL="0" indent="0">
-              <a:spcAft>
-                <a:spcPts val="200"/>
-              </a:spcAft>
-              <a:buNone/>
-            </a:pPr>
-            <a:r>
-              <a:rPr lang="en-US" sz="1050" dirty="0">
-                <a:solidFill>
-                  <a:srgbClr val="E6E9EF"/>
-                </a:solidFill>
-                <a:latin typeface="Consolas" pitchFamily="34" charset="0"/>
-                <a:ea typeface="Consolas" pitchFamily="34" charset="-122"/>
-                <a:cs typeface="Consolas" pitchFamily="34" charset="-120"/>
-              </a:rPr>
-              <a:t>      conn = DriverManager.getConnection(</a:t>
-            </a:r>
-            <a:endParaRPr lang="en-US" sz="1050" dirty="0"/>
-          </a:p>
-          <a:p>
-            <a:pPr marL="0" indent="0">
-              <a:spcAft>
-                <a:spcPts val="200"/>
-              </a:spcAft>
-              <a:buNone/>
-            </a:pPr>
-            <a:r>
-              <a:rPr lang="en-US" sz="1050" dirty="0">
-                <a:solidFill>
-                  <a:srgbClr val="F39C12"/>
-                </a:solidFill>
-                <a:latin typeface="Consolas" pitchFamily="34" charset="0"/>
-                <a:ea typeface="Consolas" pitchFamily="34" charset="-122"/>
-                <a:cs typeface="Consolas" pitchFamily="34" charset="-120"/>
-              </a:rPr>
-              <a:t>        "jdbc:sqlite:projetjava.db");</a:t>
-            </a:r>
-            <a:endParaRPr lang="en-US" sz="1050" dirty="0"/>
-          </a:p>
-          <a:p>
-            <a:pPr marL="0" indent="0">
-              <a:spcAft>
-                <a:spcPts val="200"/>
-              </a:spcAft>
-              <a:buNone/>
-            </a:pPr>
-            <a:r>
-              <a:rPr lang="en-US" sz="1050" dirty="0">
-                <a:solidFill>
-                  <a:srgbClr val="E6E9EF"/>
-                </a:solidFill>
-                <a:latin typeface="Consolas" pitchFamily="34" charset="0"/>
-                <a:ea typeface="Consolas" pitchFamily="34" charset="-122"/>
-                <a:cs typeface="Consolas" pitchFamily="34" charset="-120"/>
-              </a:rPr>
-              <a:t>    return conn;</a:t>
-            </a:r>
-            <a:endParaRPr lang="en-US" sz="1050" dirty="0"/>
-          </a:p>
-          <a:p>
-            <a:pPr marL="0" indent="0">
-              <a:spcAft>
-                <a:spcPts val="200"/>
-              </a:spcAft>
-              <a:buNone/>
-            </a:pPr>
-            <a:r>
-              <a:rPr lang="en-US" sz="1050" dirty="0">
-                <a:solidFill>
-                  <a:srgbClr val="E6E9EF"/>
-                </a:solidFill>
-                <a:latin typeface="Consolas" pitchFamily="34" charset="0"/>
-                <a:ea typeface="Consolas" pitchFamily="34" charset="-122"/>
-                <a:cs typeface="Consolas" pitchFamily="34" charset="-120"/>
-              </a:rPr>
-              <a:t>  }</a:t>
-            </a:r>
-            <a:endParaRPr lang="en-US" sz="1050" dirty="0"/>
-          </a:p>
-          <a:p>
-            <a:pPr marL="0" indent="0">
-              <a:spcAft>
-                <a:spcPts val="200"/>
-              </a:spcAft>
-              <a:buNone/>
-            </a:pPr>
-            <a:r>
-              <a:rPr lang="en-US" sz="1050" dirty="0">
-                <a:solidFill>
-                  <a:srgbClr val="F39C12"/>
-                </a:solidFill>
-                <a:latin typeface="Consolas" pitchFamily="34" charset="0"/>
-                <a:ea typeface="Consolas" pitchFamily="34" charset="-122"/>
-                <a:cs typeface="Consolas" pitchFamily="34" charset="-120"/>
-              </a:rPr>
-              <a:t>}</a:t>
-            </a:r>
-            <a:endParaRPr lang="en-US" sz="1050" dirty="0"/>
-          </a:p>
-        </p:txBody>
-      </p:sp>
-      <p:sp>
-        <p:nvSpPr>
-          <p:cNvPr id="12" name="Text 10"/>
-          <p:cNvSpPr/>
-          <p:nvPr/>
-        </p:nvSpPr>
-        <p:spPr>
-          <a:xfrm>
-            <a:off x="548640" y="4434840"/>
-            <a:ext cx="5669280" cy="365760"/>
-          </a:xfrm>
-          <a:prstGeom prst="rect">
-            <a:avLst/>
-          </a:prstGeom>
-          <a:noFill/>
-          <a:ln/>
-        </p:spPr>
-        <p:txBody>
-          <a:bodyPr wrap="square" lIns="0" tIns="0" rIns="0" bIns="0" rtlCol="0" anchor="ctr"/>
-          <a:lstStyle/>
-          <a:p>
-            <a:pPr marL="0" indent="0">
-              <a:buNone/>
-            </a:pPr>
-            <a:r>
-              <a:rPr lang="en-US" sz="1100" i="1" dirty="0">
-                <a:solidFill>
-                  <a:srgbClr val="5C6878"/>
-                </a:solidFill>
-                <a:latin typeface="Calibri" pitchFamily="34" charset="0"/>
-                <a:ea typeface="Calibri" pitchFamily="34" charset="-122"/>
-                <a:cs typeface="Calibri" pitchFamily="34" charset="-120"/>
-              </a:rPr>
-              <a:t>Une seule connexion à la base, partagée par toutes les classes.</a:t>
-            </a:r>
-            <a:endParaRPr lang="en-US" sz="1100" dirty="0"/>
-          </a:p>
-        </p:txBody>
-      </p:sp>
-      <p:sp>
-        <p:nvSpPr>
-          <p:cNvPr id="13" name="Text 11"/>
-          <p:cNvSpPr/>
-          <p:nvPr/>
-        </p:nvSpPr>
-        <p:spPr>
-          <a:xfrm>
-            <a:off x="548640" y="4892040"/>
-            <a:ext cx="5669280" cy="320040"/>
-          </a:xfrm>
-          <a:prstGeom prst="rect">
-            <a:avLst/>
-          </a:prstGeom>
-          <a:noFill/>
-          <a:ln/>
-        </p:spPr>
-        <p:txBody>
-          <a:bodyPr wrap="square" lIns="0" tIns="0" rIns="0" bIns="0" rtlCol="0" anchor="ctr"/>
-          <a:lstStyle/>
-          <a:p>
-            <a:pPr marL="0" indent="0">
-              <a:buNone/>
-            </a:pPr>
-            <a:r>
-              <a:rPr lang="en-US" sz="1100" b="1" kern="0" spc="200" dirty="0">
-                <a:solidFill>
-                  <a:srgbClr val="16A085"/>
-                </a:solidFill>
-                <a:latin typeface="Consolas" pitchFamily="34" charset="0"/>
-                <a:ea typeface="Consolas" pitchFamily="34" charset="-122"/>
-                <a:cs typeface="Consolas" pitchFamily="34" charset="-120"/>
-              </a:rPr>
-              <a:t>IDENTIFIANT AUTO  ·  Id</a:t>
-            </a:r>
-            <a:endParaRPr lang="en-US" sz="1100" dirty="0"/>
-          </a:p>
-        </p:txBody>
-      </p:sp>
-      <p:sp>
-        <p:nvSpPr>
-          <p:cNvPr id="14" name="Shape 12"/>
-          <p:cNvSpPr/>
-          <p:nvPr/>
-        </p:nvSpPr>
-        <p:spPr>
-          <a:xfrm>
-            <a:off x="548640" y="5212080"/>
-            <a:ext cx="5669280" cy="1051560"/>
-          </a:xfrm>
-          <a:prstGeom prst="rect">
-            <a:avLst/>
-          </a:prstGeom>
-          <a:solidFill>
-            <a:srgbClr val="0F1420"/>
-          </a:solidFill>
-          <a:ln w="12700">
-            <a:solidFill>
-              <a:srgbClr val="0F1420"/>
-            </a:solidFill>
-            <a:prstDash val="solid"/>
-          </a:ln>
-        </p:spPr>
-      </p:sp>
-      <p:sp>
-        <p:nvSpPr>
-          <p:cNvPr id="15" name="Shape 13"/>
-          <p:cNvSpPr/>
-          <p:nvPr/>
-        </p:nvSpPr>
-        <p:spPr>
-          <a:xfrm>
-            <a:off x="548640" y="5212080"/>
-            <a:ext cx="73152" cy="1051560"/>
-          </a:xfrm>
-          <a:prstGeom prst="rect">
-            <a:avLst/>
-          </a:prstGeom>
-          <a:solidFill>
-            <a:srgbClr val="F39C12"/>
-          </a:solidFill>
-          <a:ln w="12700">
-            <a:solidFill>
-              <a:srgbClr val="F39C12"/>
-            </a:solidFill>
-            <a:prstDash val="solid"/>
-          </a:ln>
-        </p:spPr>
-      </p:sp>
-      <p:sp>
-        <p:nvSpPr>
-          <p:cNvPr id="16" name="Shape 14"/>
-          <p:cNvSpPr/>
-          <p:nvPr/>
-        </p:nvSpPr>
-        <p:spPr>
-          <a:xfrm>
-            <a:off x="777240" y="5349240"/>
-            <a:ext cx="118872" cy="118872"/>
-          </a:xfrm>
-          <a:prstGeom prst="ellipse">
-            <a:avLst/>
-          </a:prstGeom>
-          <a:solidFill>
-            <a:srgbClr val="FF5F56"/>
-          </a:solidFill>
-          <a:ln w="12700">
-            <a:solidFill>
-              <a:srgbClr val="FF5F56"/>
-            </a:solidFill>
-            <a:prstDash val="solid"/>
-          </a:ln>
-        </p:spPr>
-      </p:sp>
-      <p:sp>
-        <p:nvSpPr>
-          <p:cNvPr id="17" name="Shape 15"/>
-          <p:cNvSpPr/>
-          <p:nvPr/>
-        </p:nvSpPr>
-        <p:spPr>
-          <a:xfrm>
-            <a:off x="960120" y="5349240"/>
-            <a:ext cx="118872" cy="118872"/>
-          </a:xfrm>
-          <a:prstGeom prst="ellipse">
-            <a:avLst/>
-          </a:prstGeom>
-          <a:solidFill>
-            <a:srgbClr val="FFBD2E"/>
-          </a:solidFill>
-          <a:ln w="12700">
-            <a:solidFill>
-              <a:srgbClr val="FFBD2E"/>
-            </a:solidFill>
-            <a:prstDash val="solid"/>
-          </a:ln>
-        </p:spPr>
-      </p:sp>
-      <p:sp>
-        <p:nvSpPr>
-          <p:cNvPr id="18" name="Shape 16"/>
-          <p:cNvSpPr/>
-          <p:nvPr/>
-        </p:nvSpPr>
-        <p:spPr>
-          <a:xfrm>
-            <a:off x="1143000" y="5349240"/>
-            <a:ext cx="118872" cy="118872"/>
-          </a:xfrm>
-          <a:prstGeom prst="ellipse">
-            <a:avLst/>
-          </a:prstGeom>
-          <a:solidFill>
-            <a:srgbClr val="27C93F"/>
-          </a:solidFill>
-          <a:ln w="12700">
-            <a:solidFill>
-              <a:srgbClr val="27C93F"/>
-            </a:solidFill>
-            <a:prstDash val="solid"/>
-          </a:ln>
-        </p:spPr>
-      </p:sp>
-      <p:sp>
-        <p:nvSpPr>
-          <p:cNvPr id="19" name="Text 17"/>
-          <p:cNvSpPr/>
-          <p:nvPr/>
-        </p:nvSpPr>
-        <p:spPr>
-          <a:xfrm>
-            <a:off x="777240" y="5623560"/>
-            <a:ext cx="5303520" cy="548640"/>
-          </a:xfrm>
-          <a:prstGeom prst="rect">
-            <a:avLst/>
-          </a:prstGeom>
-          <a:noFill/>
-          <a:ln/>
-        </p:spPr>
-        <p:txBody>
-          <a:bodyPr wrap="square" lIns="0" tIns="0" rIns="0" bIns="0" rtlCol="0" anchor="ctr"/>
-          <a:lstStyle/>
-          <a:p>
-            <a:pPr marL="0" indent="0">
-              <a:spcAft>
-                <a:spcPts val="200"/>
-              </a:spcAft>
-              <a:buNone/>
-            </a:pPr>
-            <a:r>
-              <a:rPr lang="en-US" sz="1050" dirty="0">
-                <a:solidFill>
-                  <a:srgbClr val="94A3B8"/>
-                </a:solidFill>
-                <a:latin typeface="Consolas" pitchFamily="34" charset="0"/>
-                <a:ea typeface="Consolas" pitchFamily="34" charset="-122"/>
-                <a:cs typeface="Consolas" pitchFamily="34" charset="-120"/>
-              </a:rPr>
-              <a:t>// 1er client = 1000, 2e = 1001 ...</a:t>
-            </a:r>
-            <a:endParaRPr lang="en-US" sz="1050" dirty="0"/>
-          </a:p>
-          <a:p>
-            <a:pPr marL="0" indent="0">
-              <a:spcAft>
-                <a:spcPts val="200"/>
-              </a:spcAft>
-              <a:buNone/>
-            </a:pPr>
-            <a:r>
-              <a:rPr lang="en-US" sz="1050" dirty="0">
-                <a:solidFill>
-                  <a:srgbClr val="E6E9EF"/>
-                </a:solidFill>
-                <a:latin typeface="Consolas" pitchFamily="34" charset="0"/>
-                <a:ea typeface="Consolas" pitchFamily="34" charset="-122"/>
-                <a:cs typeface="Consolas" pitchFamily="34" charset="-120"/>
-              </a:rPr>
-              <a:t>int id = compteur.getAndIncrement();</a:t>
-            </a:r>
-            <a:endParaRPr lang="en-US" sz="1050" dirty="0"/>
-          </a:p>
-        </p:txBody>
-      </p:sp>
-      <p:sp>
-        <p:nvSpPr>
-          <p:cNvPr id="20" name="Text 18"/>
-          <p:cNvSpPr/>
-          <p:nvPr/>
-        </p:nvSpPr>
-        <p:spPr>
-          <a:xfrm>
-            <a:off x="6400800" y="1645920"/>
-            <a:ext cx="5486400" cy="320040"/>
-          </a:xfrm>
-          <a:prstGeom prst="rect">
-            <a:avLst/>
-          </a:prstGeom>
-          <a:noFill/>
-          <a:ln/>
-        </p:spPr>
-        <p:txBody>
-          <a:bodyPr wrap="square" lIns="0" tIns="0" rIns="0" bIns="0" rtlCol="0" anchor="ctr"/>
-          <a:lstStyle/>
-          <a:p>
-            <a:pPr marL="0" indent="0">
-              <a:buNone/>
-            </a:pPr>
-            <a:r>
-              <a:rPr lang="en-US" sz="1100" b="1" kern="0" spc="200" dirty="0">
-                <a:solidFill>
-                  <a:srgbClr val="F39C12"/>
-                </a:solidFill>
-                <a:latin typeface="Consolas" pitchFamily="34" charset="0"/>
-                <a:ea typeface="Consolas" pitchFamily="34" charset="-122"/>
-                <a:cs typeface="Consolas" pitchFamily="34" charset="-120"/>
-              </a:rPr>
-              <a:t>VALIDATION  ·  Compteur (n° à 14 chiffres)</a:t>
-            </a:r>
-            <a:endParaRPr lang="en-US" sz="1100" dirty="0"/>
-          </a:p>
-        </p:txBody>
-      </p:sp>
-      <p:sp>
-        <p:nvSpPr>
-          <p:cNvPr id="21" name="Shape 19"/>
-          <p:cNvSpPr/>
-          <p:nvPr/>
-        </p:nvSpPr>
-        <p:spPr>
-          <a:xfrm>
-            <a:off x="6400800" y="2011680"/>
-            <a:ext cx="5303520" cy="2103120"/>
-          </a:xfrm>
-          <a:prstGeom prst="rect">
-            <a:avLst/>
-          </a:prstGeom>
-          <a:solidFill>
-            <a:srgbClr val="0F1420"/>
-          </a:solidFill>
-          <a:ln w="12700">
-            <a:solidFill>
-              <a:srgbClr val="0F1420"/>
-            </a:solidFill>
-            <a:prstDash val="solid"/>
-          </a:ln>
-        </p:spPr>
-      </p:sp>
-      <p:sp>
-        <p:nvSpPr>
-          <p:cNvPr id="22" name="Shape 20"/>
-          <p:cNvSpPr/>
-          <p:nvPr/>
-        </p:nvSpPr>
-        <p:spPr>
-          <a:xfrm>
-            <a:off x="6400800" y="2011680"/>
-            <a:ext cx="73152" cy="2103120"/>
-          </a:xfrm>
-          <a:prstGeom prst="rect">
-            <a:avLst/>
-          </a:prstGeom>
-          <a:solidFill>
-            <a:srgbClr val="F39C12"/>
-          </a:solidFill>
-          <a:ln w="12700">
-            <a:solidFill>
-              <a:srgbClr val="F39C12"/>
-            </a:solidFill>
-            <a:prstDash val="solid"/>
-          </a:ln>
-        </p:spPr>
-      </p:sp>
-      <p:sp>
-        <p:nvSpPr>
-          <p:cNvPr id="23" name="Shape 21"/>
-          <p:cNvSpPr/>
-          <p:nvPr/>
-        </p:nvSpPr>
-        <p:spPr>
-          <a:xfrm>
-            <a:off x="6629400" y="2148840"/>
-            <a:ext cx="118872" cy="118872"/>
-          </a:xfrm>
-          <a:prstGeom prst="ellipse">
-            <a:avLst/>
-          </a:prstGeom>
-          <a:solidFill>
-            <a:srgbClr val="FF5F56"/>
-          </a:solidFill>
-          <a:ln w="12700">
-            <a:solidFill>
-              <a:srgbClr val="FF5F56"/>
-            </a:solidFill>
-            <a:prstDash val="solid"/>
-          </a:ln>
-        </p:spPr>
-      </p:sp>
-      <p:sp>
-        <p:nvSpPr>
-          <p:cNvPr id="24" name="Shape 22"/>
-          <p:cNvSpPr/>
-          <p:nvPr/>
-        </p:nvSpPr>
-        <p:spPr>
-          <a:xfrm>
-            <a:off x="6812280" y="2148840"/>
-            <a:ext cx="118872" cy="118872"/>
-          </a:xfrm>
-          <a:prstGeom prst="ellipse">
-            <a:avLst/>
-          </a:prstGeom>
-          <a:solidFill>
-            <a:srgbClr val="FFBD2E"/>
-          </a:solidFill>
-          <a:ln w="12700">
-            <a:solidFill>
-              <a:srgbClr val="FFBD2E"/>
-            </a:solidFill>
-            <a:prstDash val="solid"/>
-          </a:ln>
-        </p:spPr>
-      </p:sp>
-      <p:sp>
-        <p:nvSpPr>
-          <p:cNvPr id="25" name="Shape 23"/>
-          <p:cNvSpPr/>
-          <p:nvPr/>
-        </p:nvSpPr>
-        <p:spPr>
-          <a:xfrm>
-            <a:off x="6995160" y="2148840"/>
-            <a:ext cx="118872" cy="118872"/>
-          </a:xfrm>
-          <a:prstGeom prst="ellipse">
-            <a:avLst/>
-          </a:prstGeom>
-          <a:solidFill>
-            <a:srgbClr val="27C93F"/>
-          </a:solidFill>
-          <a:ln w="12700">
-            <a:solidFill>
-              <a:srgbClr val="27C93F"/>
-            </a:solidFill>
-            <a:prstDash val="solid"/>
-          </a:ln>
-        </p:spPr>
-      </p:sp>
-      <p:sp>
-        <p:nvSpPr>
-          <p:cNvPr id="26" name="Text 24"/>
-          <p:cNvSpPr/>
-          <p:nvPr/>
-        </p:nvSpPr>
-        <p:spPr>
-          <a:xfrm>
-            <a:off x="7269480" y="2084832"/>
-            <a:ext cx="4297680" cy="274320"/>
-          </a:xfrm>
-          <a:prstGeom prst="rect">
-            <a:avLst/>
-          </a:prstGeom>
-          <a:noFill/>
-          <a:ln/>
-        </p:spPr>
-        <p:txBody>
-          <a:bodyPr wrap="square" lIns="0" tIns="0" rIns="0" bIns="0" rtlCol="0" anchor="ctr"/>
-          <a:lstStyle/>
-          <a:p>
-            <a:pPr marL="0" indent="0">
-              <a:buNone/>
-            </a:pPr>
-            <a:r>
-              <a:rPr lang="en-US" sz="1000" i="1" dirty="0">
-                <a:solidFill>
-                  <a:srgbClr val="94A3B8"/>
-                </a:solidFill>
-                <a:latin typeface="Consolas" pitchFamily="34" charset="0"/>
-                <a:ea typeface="Consolas" pitchFamily="34" charset="-122"/>
-                <a:cs typeface="Consolas" pitchFamily="34" charset="-120"/>
-              </a:rPr>
-              <a:t>Compteur.java</a:t>
-            </a:r>
-            <a:endParaRPr lang="en-US" sz="1000" dirty="0"/>
-          </a:p>
-        </p:txBody>
-      </p:sp>
-      <p:sp>
-        <p:nvSpPr>
-          <p:cNvPr id="27" name="Text 25"/>
-          <p:cNvSpPr/>
-          <p:nvPr/>
-        </p:nvSpPr>
-        <p:spPr>
-          <a:xfrm>
-            <a:off x="6629400" y="2423160"/>
-            <a:ext cx="4937760" cy="1600200"/>
-          </a:xfrm>
-          <a:prstGeom prst="rect">
-            <a:avLst/>
-          </a:prstGeom>
-          <a:noFill/>
-          <a:ln/>
-        </p:spPr>
-        <p:txBody>
-          <a:bodyPr wrap="square" lIns="0" tIns="0" rIns="0" bIns="0" rtlCol="0" anchor="ctr"/>
-          <a:lstStyle/>
-          <a:p>
-            <a:pPr marL="0" indent="0">
-              <a:spcAft>
-                <a:spcPts val="200"/>
-              </a:spcAft>
-              <a:buNone/>
-            </a:pPr>
-            <a:r>
-              <a:rPr lang="en-US" sz="1050" dirty="0">
-                <a:solidFill>
-                  <a:srgbClr val="16A085"/>
-                </a:solidFill>
-                <a:latin typeface="Consolas" pitchFamily="34" charset="0"/>
-                <a:ea typeface="Consolas" pitchFamily="34" charset="-122"/>
-                <a:cs typeface="Consolas" pitchFamily="34" charset="-120"/>
-              </a:rPr>
-              <a:t>public void setNumero(String numero) {</a:t>
-            </a:r>
-            <a:endParaRPr lang="en-US" sz="1050" dirty="0"/>
-          </a:p>
-          <a:p>
-            <a:pPr marL="0" indent="0">
-              <a:spcAft>
-                <a:spcPts val="200"/>
-              </a:spcAft>
-              <a:buNone/>
-            </a:pPr>
-            <a:r>
-              <a:rPr lang="en-US" sz="1050" dirty="0">
-                <a:solidFill>
-                  <a:srgbClr val="E6E9EF"/>
-                </a:solidFill>
-                <a:latin typeface="Consolas" pitchFamily="34" charset="0"/>
-                <a:ea typeface="Consolas" pitchFamily="34" charset="-122"/>
-                <a:cs typeface="Consolas" pitchFamily="34" charset="-120"/>
-              </a:rPr>
-              <a:t>  if (numero.length() != 14)</a:t>
-            </a:r>
-            <a:endParaRPr lang="en-US" sz="1050" dirty="0"/>
-          </a:p>
-          <a:p>
-            <a:pPr marL="0" indent="0">
-              <a:spcAft>
-                <a:spcPts val="200"/>
-              </a:spcAft>
-              <a:buNone/>
-            </a:pPr>
-            <a:r>
-              <a:rPr lang="en-US" sz="1050" dirty="0">
-                <a:solidFill>
-                  <a:srgbClr val="E74C3C"/>
-                </a:solidFill>
-                <a:latin typeface="Consolas" pitchFamily="34" charset="0"/>
-                <a:ea typeface="Consolas" pitchFamily="34" charset="-122"/>
-                <a:cs typeface="Consolas" pitchFamily="34" charset="-120"/>
-              </a:rPr>
-              <a:t>    throw new IllegalArgumentException(</a:t>
-            </a:r>
-            <a:endParaRPr lang="en-US" sz="1050" dirty="0"/>
-          </a:p>
-          <a:p>
-            <a:pPr marL="0" indent="0">
-              <a:spcAft>
-                <a:spcPts val="200"/>
-              </a:spcAft>
-              <a:buNone/>
-            </a:pPr>
-            <a:r>
-              <a:rPr lang="en-US" sz="1050" dirty="0">
-                <a:solidFill>
-                  <a:srgbClr val="F39C12"/>
-                </a:solidFill>
-                <a:latin typeface="Consolas" pitchFamily="34" charset="0"/>
-                <a:ea typeface="Consolas" pitchFamily="34" charset="-122"/>
-                <a:cs typeface="Consolas" pitchFamily="34" charset="-120"/>
-              </a:rPr>
-              <a:t>      "Le numéro doit faire 14 chiffres");</a:t>
-            </a:r>
-            <a:endParaRPr lang="en-US" sz="1050" dirty="0"/>
-          </a:p>
-          <a:p>
-            <a:pPr marL="0" indent="0">
-              <a:spcAft>
-                <a:spcPts val="200"/>
-              </a:spcAft>
-              <a:buNone/>
-            </a:pPr>
-            <a:r>
-              <a:rPr lang="en-US" sz="1050" dirty="0">
-                <a:solidFill>
-                  <a:srgbClr val="E6E9EF"/>
-                </a:solidFill>
-                <a:latin typeface="Consolas" pitchFamily="34" charset="0"/>
-                <a:ea typeface="Consolas" pitchFamily="34" charset="-122"/>
-                <a:cs typeface="Consolas" pitchFamily="34" charset="-120"/>
-              </a:rPr>
-              <a:t>  this.numero = numero;</a:t>
-            </a:r>
-            <a:endParaRPr lang="en-US" sz="1050" dirty="0"/>
-          </a:p>
-          <a:p>
-            <a:pPr marL="0" indent="0">
-              <a:spcAft>
-                <a:spcPts val="200"/>
-              </a:spcAft>
-              <a:buNone/>
-            </a:pPr>
-            <a:r>
-              <a:rPr lang="en-US" sz="1050" dirty="0">
-                <a:solidFill>
-                  <a:srgbClr val="16A085"/>
-                </a:solidFill>
-                <a:latin typeface="Consolas" pitchFamily="34" charset="0"/>
-                <a:ea typeface="Consolas" pitchFamily="34" charset="-122"/>
-                <a:cs typeface="Consolas" pitchFamily="34" charset="-120"/>
-              </a:rPr>
-              <a:t>}</a:t>
-            </a:r>
-            <a:endParaRPr lang="en-US" sz="1050" dirty="0"/>
-          </a:p>
-        </p:txBody>
-      </p:sp>
-      <p:sp>
-        <p:nvSpPr>
-          <p:cNvPr id="28" name="Text 26"/>
-          <p:cNvSpPr/>
-          <p:nvPr/>
-        </p:nvSpPr>
-        <p:spPr>
-          <a:xfrm>
-            <a:off x="6400800" y="4251960"/>
-            <a:ext cx="5486400" cy="320040"/>
-          </a:xfrm>
-          <a:prstGeom prst="rect">
-            <a:avLst/>
-          </a:prstGeom>
-          <a:noFill/>
-          <a:ln/>
-        </p:spPr>
-        <p:txBody>
-          <a:bodyPr wrap="square" lIns="0" tIns="0" rIns="0" bIns="0" rtlCol="0" anchor="ctr"/>
-          <a:lstStyle/>
-          <a:p>
-            <a:pPr marL="0" indent="0">
-              <a:buNone/>
-            </a:pPr>
-            <a:r>
-              <a:rPr lang="en-US" sz="1100" b="1" kern="0" spc="200" dirty="0">
-                <a:solidFill>
-                  <a:srgbClr val="9B2C8E"/>
-                </a:solidFill>
-                <a:latin typeface="Consolas" pitchFamily="34" charset="0"/>
-                <a:ea typeface="Consolas" pitchFamily="34" charset="-122"/>
-                <a:cs typeface="Consolas" pitchFamily="34" charset="-120"/>
-              </a:rPr>
-              <a:t>CALCUL DU MONTANT  ·  Facture (0,15 €/kWh)</a:t>
-            </a:r>
-            <a:endParaRPr lang="en-US" sz="1100" dirty="0"/>
-          </a:p>
-        </p:txBody>
-      </p:sp>
-      <p:sp>
-        <p:nvSpPr>
-          <p:cNvPr id="29" name="Shape 27"/>
-          <p:cNvSpPr/>
-          <p:nvPr/>
-        </p:nvSpPr>
-        <p:spPr>
-          <a:xfrm>
-            <a:off x="6400800" y="4572000"/>
-            <a:ext cx="5303520" cy="1691640"/>
-          </a:xfrm>
-          <a:prstGeom prst="rect">
-            <a:avLst/>
-          </a:prstGeom>
-          <a:solidFill>
-            <a:srgbClr val="0F1420"/>
-          </a:solidFill>
-          <a:ln w="12700">
-            <a:solidFill>
-              <a:srgbClr val="0F1420"/>
-            </a:solidFill>
-            <a:prstDash val="solid"/>
-          </a:ln>
-        </p:spPr>
-      </p:sp>
-      <p:sp>
-        <p:nvSpPr>
-          <p:cNvPr id="30" name="Shape 28"/>
-          <p:cNvSpPr/>
-          <p:nvPr/>
-        </p:nvSpPr>
-        <p:spPr>
-          <a:xfrm>
-            <a:off x="6400800" y="4572000"/>
-            <a:ext cx="73152" cy="1691640"/>
-          </a:xfrm>
-          <a:prstGeom prst="rect">
-            <a:avLst/>
-          </a:prstGeom>
-          <a:solidFill>
-            <a:srgbClr val="F39C12"/>
-          </a:solidFill>
-          <a:ln w="12700">
-            <a:solidFill>
-              <a:srgbClr val="F39C12"/>
-            </a:solidFill>
-            <a:prstDash val="solid"/>
-          </a:ln>
-        </p:spPr>
-      </p:sp>
-      <p:sp>
-        <p:nvSpPr>
-          <p:cNvPr id="31" name="Shape 29"/>
-          <p:cNvSpPr/>
-          <p:nvPr/>
-        </p:nvSpPr>
-        <p:spPr>
-          <a:xfrm>
-            <a:off x="6629400" y="4709160"/>
-            <a:ext cx="118872" cy="118872"/>
-          </a:xfrm>
-          <a:prstGeom prst="ellipse">
-            <a:avLst/>
-          </a:prstGeom>
-          <a:solidFill>
-            <a:srgbClr val="FF5F56"/>
-          </a:solidFill>
-          <a:ln w="12700">
-            <a:solidFill>
-              <a:srgbClr val="FF5F56"/>
-            </a:solidFill>
-            <a:prstDash val="solid"/>
-          </a:ln>
-        </p:spPr>
-      </p:sp>
-      <p:sp>
-        <p:nvSpPr>
-          <p:cNvPr id="32" name="Shape 30"/>
-          <p:cNvSpPr/>
-          <p:nvPr/>
-        </p:nvSpPr>
-        <p:spPr>
-          <a:xfrm>
-            <a:off x="6812280" y="4709160"/>
-            <a:ext cx="118872" cy="118872"/>
-          </a:xfrm>
-          <a:prstGeom prst="ellipse">
-            <a:avLst/>
-          </a:prstGeom>
-          <a:solidFill>
-            <a:srgbClr val="FFBD2E"/>
-          </a:solidFill>
-          <a:ln w="12700">
-            <a:solidFill>
-              <a:srgbClr val="FFBD2E"/>
-            </a:solidFill>
-            <a:prstDash val="solid"/>
-          </a:ln>
-        </p:spPr>
-      </p:sp>
-      <p:sp>
-        <p:nvSpPr>
-          <p:cNvPr id="33" name="Shape 31"/>
-          <p:cNvSpPr/>
-          <p:nvPr/>
-        </p:nvSpPr>
-        <p:spPr>
-          <a:xfrm>
-            <a:off x="6995160" y="4709160"/>
-            <a:ext cx="118872" cy="118872"/>
-          </a:xfrm>
-          <a:prstGeom prst="ellipse">
-            <a:avLst/>
-          </a:prstGeom>
-          <a:solidFill>
-            <a:srgbClr val="27C93F"/>
-          </a:solidFill>
-          <a:ln w="12700">
-            <a:solidFill>
-              <a:srgbClr val="27C93F"/>
-            </a:solidFill>
-            <a:prstDash val="solid"/>
-          </a:ln>
-        </p:spPr>
-      </p:sp>
-      <p:sp>
-        <p:nvSpPr>
-          <p:cNvPr id="34" name="Text 32"/>
-          <p:cNvSpPr/>
-          <p:nvPr/>
-        </p:nvSpPr>
-        <p:spPr>
-          <a:xfrm>
-            <a:off x="7269480" y="4645152"/>
-            <a:ext cx="4297680" cy="274320"/>
-          </a:xfrm>
-          <a:prstGeom prst="rect">
-            <a:avLst/>
-          </a:prstGeom>
-          <a:noFill/>
-          <a:ln/>
-        </p:spPr>
-        <p:txBody>
-          <a:bodyPr wrap="square" lIns="0" tIns="0" rIns="0" bIns="0" rtlCol="0" anchor="ctr"/>
-          <a:lstStyle/>
-          <a:p>
-            <a:pPr marL="0" indent="0">
-              <a:buNone/>
-            </a:pPr>
-            <a:r>
-              <a:rPr lang="en-US" sz="1000" i="1" dirty="0">
-                <a:solidFill>
-                  <a:srgbClr val="94A3B8"/>
-                </a:solidFill>
-                <a:latin typeface="Consolas" pitchFamily="34" charset="0"/>
-                <a:ea typeface="Consolas" pitchFamily="34" charset="-122"/>
-                <a:cs typeface="Consolas" pitchFamily="34" charset="-120"/>
-              </a:rPr>
-              <a:t>Facture.java</a:t>
-            </a:r>
-            <a:endParaRPr lang="en-US" sz="1000" dirty="0"/>
-          </a:p>
-        </p:txBody>
-      </p:sp>
-      <p:sp>
-        <p:nvSpPr>
-          <p:cNvPr id="35" name="Text 33"/>
-          <p:cNvSpPr/>
-          <p:nvPr/>
-        </p:nvSpPr>
-        <p:spPr>
-          <a:xfrm>
-            <a:off x="6629400" y="4983480"/>
-            <a:ext cx="4937760" cy="1188720"/>
-          </a:xfrm>
-          <a:prstGeom prst="rect">
-            <a:avLst/>
-          </a:prstGeom>
-          <a:noFill/>
-          <a:ln/>
-        </p:spPr>
-        <p:txBody>
-          <a:bodyPr wrap="square" lIns="0" tIns="0" rIns="0" bIns="0" rtlCol="0" anchor="ctr"/>
-          <a:lstStyle/>
-          <a:p>
-            <a:pPr marL="0" indent="0">
-              <a:spcAft>
-                <a:spcPts val="200"/>
-              </a:spcAft>
-              <a:buNone/>
-            </a:pPr>
-            <a:r>
-              <a:rPr lang="en-US" sz="1050" dirty="0">
-                <a:solidFill>
-                  <a:srgbClr val="16A085"/>
-                </a:solidFill>
-                <a:latin typeface="Consolas" pitchFamily="34" charset="0"/>
-                <a:ea typeface="Consolas" pitchFamily="34" charset="-122"/>
-                <a:cs typeface="Consolas" pitchFamily="34" charset="-120"/>
-              </a:rPr>
-              <a:t>public double calculerMontant() {</a:t>
-            </a:r>
-            <a:endParaRPr lang="en-US" sz="1050" dirty="0"/>
-          </a:p>
-          <a:p>
-            <a:pPr marL="0" indent="0">
-              <a:spcAft>
-                <a:spcPts val="200"/>
-              </a:spcAft>
-              <a:buNone/>
-            </a:pPr>
-            <a:r>
-              <a:rPr lang="en-US" sz="1050" dirty="0">
-                <a:solidFill>
-                  <a:srgbClr val="94A3B8"/>
-                </a:solidFill>
-                <a:latin typeface="Consolas" pitchFamily="34" charset="0"/>
-                <a:ea typeface="Consolas" pitchFamily="34" charset="-122"/>
-                <a:cs typeface="Consolas" pitchFamily="34" charset="-120"/>
-              </a:rPr>
-              <a:t>  double TARIF = 0.15;  // € par kWh</a:t>
-            </a:r>
-            <a:endParaRPr lang="en-US" sz="1050" dirty="0"/>
-          </a:p>
-          <a:p>
-            <a:pPr marL="0" indent="0">
-              <a:spcAft>
-                <a:spcPts val="200"/>
-              </a:spcAft>
-              <a:buNone/>
-            </a:pPr>
-            <a:r>
-              <a:rPr lang="en-US" sz="1050" dirty="0">
-                <a:solidFill>
-                  <a:srgbClr val="E6E9EF"/>
-                </a:solidFill>
-                <a:latin typeface="Consolas" pitchFamily="34" charset="0"/>
-                <a:ea typeface="Consolas" pitchFamily="34" charset="-122"/>
-                <a:cs typeface="Consolas" pitchFamily="34" charset="-120"/>
-              </a:rPr>
-              <a:t>  return consommation * TARIF;</a:t>
-            </a:r>
-            <a:endParaRPr lang="en-US" sz="1050" dirty="0"/>
-          </a:p>
-          <a:p>
-            <a:pPr marL="0" indent="0">
-              <a:spcAft>
-                <a:spcPts val="200"/>
-              </a:spcAft>
-              <a:buNone/>
-            </a:pPr>
-            <a:r>
-              <a:rPr lang="en-US" sz="1050" dirty="0">
-                <a:solidFill>
-                  <a:srgbClr val="16A085"/>
-                </a:solidFill>
-                <a:latin typeface="Consolas" pitchFamily="34" charset="0"/>
-                <a:ea typeface="Consolas" pitchFamily="34" charset="-122"/>
-                <a:cs typeface="Consolas" pitchFamily="34" charset="-120"/>
-              </a:rPr>
               <a:t>}</a:t>
             </a:r>
             <a:endParaRPr lang="en-US" sz="1050" dirty="0"/>
@@ -14002,6 +13927,78 @@
           </a:p>
         </p:txBody>
       </p:sp>
+      <p:pic>
+        <p:nvPicPr>
+          <p:cNvPr id="38" name="Image 37"/>
+          <p:cNvPicPr>
+            <a:picLocks noChangeAspect="1"/>
+          </p:cNvPicPr>
+          <p:nvPr/>
+        </p:nvPicPr>
+        <p:blipFill>
+          <a:blip r:embed="rId3"/>
+          <a:stretch>
+            <a:fillRect/>
+          </a:stretch>
+        </p:blipFill>
+        <p:spPr>
+          <a:xfrm>
+            <a:off x="640080" y="2141132"/>
+            <a:ext cx="4587638" cy="2027096"/>
+          </a:xfrm>
+          <a:prstGeom prst="rect">
+            <a:avLst/>
+          </a:prstGeom>
+        </p:spPr>
+      </p:pic>
+      <p:pic>
+        <p:nvPicPr>
+          <p:cNvPr id="39" name="Image 38"/>
+          <p:cNvPicPr>
+            <a:picLocks noChangeAspect="1"/>
+          </p:cNvPicPr>
+          <p:nvPr/>
+        </p:nvPicPr>
+        <p:blipFill>
+          <a:blip r:embed="rId4"/>
+          <a:stretch>
+            <a:fillRect/>
+          </a:stretch>
+        </p:blipFill>
+        <p:spPr>
+          <a:xfrm>
+            <a:off x="6476359" y="2083567"/>
+            <a:ext cx="5227961" cy="2084661"/>
+          </a:xfrm>
+          <a:prstGeom prst="rect">
+            <a:avLst/>
+          </a:prstGeom>
+        </p:spPr>
+      </p:pic>
+      <p:pic>
+        <p:nvPicPr>
+          <p:cNvPr id="40" name="Image 39"/>
+          <p:cNvPicPr>
+            <a:picLocks noChangeAspect="1"/>
+          </p:cNvPicPr>
+          <p:nvPr/>
+        </p:nvPicPr>
+        <p:blipFill>
+          <a:blip r:embed="rId5"/>
+          <a:stretch>
+            <a:fillRect/>
+          </a:stretch>
+        </p:blipFill>
+        <p:spPr>
+          <a:xfrm>
+            <a:off x="594360" y="5333963"/>
+            <a:ext cx="4976291" cy="853514"/>
+          </a:xfrm>
+          <a:prstGeom prst="rect">
+            <a:avLst/>
+          </a:prstGeom>
+        </p:spPr>
+      </p:pic>
     </p:spTree>
   </p:cSld>
   <p:clrMapOvr>

--- a/EDI ENERGIE Soutenance.pptx
+++ b/EDI ENERGIE Soutenance.pptx
@@ -4600,7 +4600,17 @@
                 <a:latin typeface="Calibri" pitchFamily="34" charset="0"/>
                 <a:cs typeface="Calibri" pitchFamily="34" charset="-120"/>
               </a:rPr>
-              <a:t>Statistiques de consummation </a:t>
+              <a:t>Statistiques de </a:t>
+            </a:r>
+            <a:r>
+              <a:rPr lang="en-US" sz="1350" b="1" dirty="0" smtClean="0">
+                <a:solidFill>
+                  <a:srgbClr val="1A1F2E"/>
+                </a:solidFill>
+                <a:latin typeface="Calibri" pitchFamily="34" charset="0"/>
+                <a:cs typeface="Calibri" pitchFamily="34" charset="-120"/>
+              </a:rPr>
+              <a:t>consommation </a:t>
             </a:r>
             <a:endParaRPr lang="en-US" sz="1350" dirty="0"/>
           </a:p>
@@ -4738,18 +4748,7 @@
                 <a:ea typeface="Calibri" pitchFamily="34" charset="-122"/>
                 <a:cs typeface="Calibri" pitchFamily="34" charset="-120"/>
               </a:rPr>
-              <a:t>Mult</a:t>
-            </a:r>
-            <a:r>
-              <a:rPr lang="en-US" sz="1350" b="1" dirty="0" smtClean="0">
-                <a:solidFill>
-                  <a:srgbClr val="1A1F2E"/>
-                </a:solidFill>
-                <a:latin typeface="Calibri" pitchFamily="34" charset="0"/>
-                <a:ea typeface="Calibri" pitchFamily="34" charset="-122"/>
-                <a:cs typeface="Calibri" pitchFamily="34" charset="-120"/>
-              </a:rPr>
-              <a:t>ltheme</a:t>
+              <a:t>Multltheme</a:t>
             </a:r>
             <a:endParaRPr lang="en-US" sz="1350" dirty="0"/>
           </a:p>
@@ -4788,18 +4787,7 @@
                 <a:ea typeface="Calibri" pitchFamily="34" charset="-122"/>
                 <a:cs typeface="Calibri" pitchFamily="34" charset="-120"/>
               </a:rPr>
-              <a:t>Proposer d’autre</a:t>
-            </a:r>
-            <a:r>
-              <a:rPr lang="en-US" sz="1050" dirty="0" smtClean="0">
-                <a:solidFill>
-                  <a:srgbClr val="5C6878"/>
-                </a:solidFill>
-                <a:latin typeface="Calibri" pitchFamily="34" charset="0"/>
-                <a:ea typeface="Calibri" pitchFamily="34" charset="-122"/>
-                <a:cs typeface="Calibri" pitchFamily="34" charset="-120"/>
-              </a:rPr>
-              <a:t>e theme </a:t>
+              <a:t>Proposer d’autree theme </a:t>
             </a:r>
             <a:endParaRPr lang="en-US" sz="1050" dirty="0"/>
           </a:p>
@@ -12387,7 +12375,62 @@
                 <a:ea typeface="Calibri" pitchFamily="34" charset="-122"/>
                 <a:cs typeface="Calibri" pitchFamily="34" charset="-120"/>
               </a:rPr>
-              <a:t>·  crée automatiquement les 4 tables au premier lancement. ConnexionDB fournit la connexion partagée.</a:t>
+              <a:t>·  crée automatiquement les 4 tables au premier </a:t>
+            </a:r>
+            <a:r>
+              <a:rPr lang="en-US" sz="1150" dirty="0" err="1" smtClean="0">
+                <a:solidFill>
+                  <a:srgbClr val="1A1F2E"/>
+                </a:solidFill>
+                <a:latin typeface="Calibri" pitchFamily="34" charset="0"/>
+                <a:ea typeface="Calibri" pitchFamily="34" charset="-122"/>
+                <a:cs typeface="Calibri" pitchFamily="34" charset="-120"/>
+              </a:rPr>
+              <a:t>lancement</a:t>
+            </a:r>
+            <a:r>
+              <a:rPr lang="en-US" sz="1150" dirty="0" smtClean="0">
+                <a:solidFill>
+                  <a:srgbClr val="1A1F2E"/>
+                </a:solidFill>
+                <a:latin typeface="Calibri" pitchFamily="34" charset="0"/>
+                <a:ea typeface="Calibri" pitchFamily="34" charset="-122"/>
+                <a:cs typeface="Calibri" pitchFamily="34" charset="-120"/>
+              </a:rPr>
+              <a:t>(</a:t>
+            </a:r>
+            <a:r>
+              <a:rPr lang="en-US" sz="1150" dirty="0" err="1" smtClean="0">
+                <a:solidFill>
+                  <a:srgbClr val="1A1F2E"/>
+                </a:solidFill>
+                <a:latin typeface="Calibri" pitchFamily="34" charset="0"/>
+                <a:ea typeface="Calibri" pitchFamily="34" charset="-122"/>
+                <a:cs typeface="Calibri" pitchFamily="34" charset="-120"/>
+              </a:rPr>
+              <a:t>Java.sql</a:t>
+            </a:r>
+            <a:r>
+              <a:rPr lang="en-US" sz="1150" dirty="0" smtClean="0">
+                <a:solidFill>
+                  <a:srgbClr val="1A1F2E"/>
+                </a:solidFill>
+                <a:latin typeface="Calibri" pitchFamily="34" charset="0"/>
+                <a:ea typeface="Calibri" pitchFamily="34" charset="-122"/>
+                <a:cs typeface="Calibri" pitchFamily="34" charset="-120"/>
+              </a:rPr>
+              <a:t>). </a:t>
+            </a:r>
+            <a:r>
+              <a:rPr lang="en-US" sz="1150" dirty="0">
+                <a:solidFill>
+                  <a:srgbClr val="1A1F2E"/>
+                </a:solidFill>
+                <a:latin typeface="Calibri" pitchFamily="34" charset="0"/>
+                <a:ea typeface="Calibri" pitchFamily="34" charset="-122"/>
+                <a:cs typeface="Calibri" pitchFamily="34" charset="-120"/>
+              </a:rPr>
+              <a:t>ConnexionDB fournit la connexion partagée.</a:t>
             </a:r>
             <a:endParaRPr lang="en-US" sz="1150" dirty="0"/>
           </a:p>
@@ -12590,7 +12633,7 @@
               <a:buNone/>
             </a:pPr>
             <a:r>
-              <a:rPr lang="en-US" sz="2900" b="1" dirty="0">
+              <a:rPr lang="en-US" sz="2900" b="1" dirty="0" smtClean="0">
                 <a:solidFill>
                   <a:srgbClr val="1A1F2E"/>
                 </a:solidFill>
@@ -12598,7 +12641,18 @@
                 <a:ea typeface="Georgia" pitchFamily="34" charset="-122"/>
                 <a:cs typeface="Georgia" pitchFamily="34" charset="-120"/>
               </a:rPr>
-              <a:t>Deux mécanismes clés du projet</a:t>
+              <a:t>Des </a:t>
+            </a:r>
+            <a:r>
+              <a:rPr lang="en-US" sz="2900" b="1" dirty="0">
+                <a:solidFill>
+                  <a:srgbClr val="1A1F2E"/>
+                </a:solidFill>
+                <a:latin typeface="Georgia" pitchFamily="34" charset="0"/>
+                <a:ea typeface="Georgia" pitchFamily="34" charset="-122"/>
+                <a:cs typeface="Georgia" pitchFamily="34" charset="-120"/>
+              </a:rPr>
+              <a:t>mécanismes clés du projet</a:t>
             </a:r>
             <a:endParaRPr lang="en-US" sz="2900" dirty="0"/>
           </a:p>
